--- a/tinzr_gui/TinZr_Logo_PPT.pptx
+++ b/tinzr_gui/TinZr_Logo_PPT.pptx
@@ -6,7 +6,9 @@
   </p:sldMasterIdLst>
   <p:sldIdLst>
     <p:sldId id="257" r:id="rId2"/>
-    <p:sldId id="256" r:id="rId3"/>
+    <p:sldId id="258" r:id="rId3"/>
+    <p:sldId id="259" r:id="rId4"/>
+    <p:sldId id="256" r:id="rId5"/>
   </p:sldIdLst>
   <p:sldSz cx="12192000" cy="6858000"/>
   <p:notesSz cx="6858000" cy="9144000"/>
@@ -105,6 +107,11 @@
       </a:defRPr>
     </a:lvl9pPr>
   </p:defaultTextStyle>
+  <p:extLst>
+    <p:ext uri="{EFAFB233-063F-42B5-8137-9DF3F51BA10A}">
+      <p15:sldGuideLst xmlns:p15="http://schemas.microsoft.com/office/powerpoint/2012/main"/>
+    </p:ext>
+  </p:extLst>
 </p:presentation>
 </file>
 
@@ -390,7 +397,7 @@
           <a:p>
             <a:fld id="{78C61E38-1EBD-4C19-928D-AE714A78A881}" type="datetimeFigureOut">
               <a:rPr lang="en-US" smtClean="0"/>
-              <a:t>10/25/2025</a:t>
+              <a:t>12/10/2025</a:t>
             </a:fld>
             <a:endParaRPr lang="en-US"/>
           </a:p>
@@ -588,7 +595,7 @@
           <a:p>
             <a:fld id="{78C61E38-1EBD-4C19-928D-AE714A78A881}" type="datetimeFigureOut">
               <a:rPr lang="en-US" smtClean="0"/>
-              <a:t>10/25/2025</a:t>
+              <a:t>12/10/2025</a:t>
             </a:fld>
             <a:endParaRPr lang="en-US"/>
           </a:p>
@@ -796,7 +803,7 @@
           <a:p>
             <a:fld id="{78C61E38-1EBD-4C19-928D-AE714A78A881}" type="datetimeFigureOut">
               <a:rPr lang="en-US" smtClean="0"/>
-              <a:t>10/25/2025</a:t>
+              <a:t>12/10/2025</a:t>
             </a:fld>
             <a:endParaRPr lang="en-US"/>
           </a:p>
@@ -994,7 +1001,7 @@
           <a:p>
             <a:fld id="{78C61E38-1EBD-4C19-928D-AE714A78A881}" type="datetimeFigureOut">
               <a:rPr lang="en-US" smtClean="0"/>
-              <a:t>10/25/2025</a:t>
+              <a:t>12/10/2025</a:t>
             </a:fld>
             <a:endParaRPr lang="en-US"/>
           </a:p>
@@ -1269,7 +1276,7 @@
           <a:p>
             <a:fld id="{78C61E38-1EBD-4C19-928D-AE714A78A881}" type="datetimeFigureOut">
               <a:rPr lang="en-US" smtClean="0"/>
-              <a:t>10/25/2025</a:t>
+              <a:t>12/10/2025</a:t>
             </a:fld>
             <a:endParaRPr lang="en-US"/>
           </a:p>
@@ -1534,7 +1541,7 @@
           <a:p>
             <a:fld id="{78C61E38-1EBD-4C19-928D-AE714A78A881}" type="datetimeFigureOut">
               <a:rPr lang="en-US" smtClean="0"/>
-              <a:t>10/25/2025</a:t>
+              <a:t>12/10/2025</a:t>
             </a:fld>
             <a:endParaRPr lang="en-US"/>
           </a:p>
@@ -1946,7 +1953,7 @@
           <a:p>
             <a:fld id="{78C61E38-1EBD-4C19-928D-AE714A78A881}" type="datetimeFigureOut">
               <a:rPr lang="en-US" smtClean="0"/>
-              <a:t>10/25/2025</a:t>
+              <a:t>12/10/2025</a:t>
             </a:fld>
             <a:endParaRPr lang="en-US"/>
           </a:p>
@@ -2087,7 +2094,7 @@
           <a:p>
             <a:fld id="{78C61E38-1EBD-4C19-928D-AE714A78A881}" type="datetimeFigureOut">
               <a:rPr lang="en-US" smtClean="0"/>
-              <a:t>10/25/2025</a:t>
+              <a:t>12/10/2025</a:t>
             </a:fld>
             <a:endParaRPr lang="en-US"/>
           </a:p>
@@ -2200,7 +2207,7 @@
           <a:p>
             <a:fld id="{78C61E38-1EBD-4C19-928D-AE714A78A881}" type="datetimeFigureOut">
               <a:rPr lang="en-US" smtClean="0"/>
-              <a:t>10/25/2025</a:t>
+              <a:t>12/10/2025</a:t>
             </a:fld>
             <a:endParaRPr lang="en-US"/>
           </a:p>
@@ -2511,7 +2518,7 @@
           <a:p>
             <a:fld id="{78C61E38-1EBD-4C19-928D-AE714A78A881}" type="datetimeFigureOut">
               <a:rPr lang="en-US" smtClean="0"/>
-              <a:t>10/25/2025</a:t>
+              <a:t>12/10/2025</a:t>
             </a:fld>
             <a:endParaRPr lang="en-US"/>
           </a:p>
@@ -2799,7 +2806,7 @@
           <a:p>
             <a:fld id="{78C61E38-1EBD-4C19-928D-AE714A78A881}" type="datetimeFigureOut">
               <a:rPr lang="en-US" smtClean="0"/>
-              <a:t>10/25/2025</a:t>
+              <a:t>12/10/2025</a:t>
             </a:fld>
             <a:endParaRPr lang="en-US"/>
           </a:p>
@@ -3040,7 +3047,7 @@
           <a:p>
             <a:fld id="{78C61E38-1EBD-4C19-928D-AE714A78A881}" type="datetimeFigureOut">
               <a:rPr lang="en-US" smtClean="0"/>
-              <a:t>10/25/2025</a:t>
+              <a:t>12/10/2025</a:t>
             </a:fld>
             <a:endParaRPr lang="en-US"/>
           </a:p>
@@ -3483,8 +3490,8 @@
             <a:chExt cx="3565560" cy="1471680"/>
           </a:xfrm>
         </p:grpSpPr>
-        <mc:AlternateContent xmlns:mc="http://schemas.openxmlformats.org/markup-compatibility/2006">
-          <mc:Choice xmlns:p14="http://schemas.microsoft.com/office/powerpoint/2010/main" Requires="p14">
+        <mc:AlternateContent xmlns:mc="http://schemas.openxmlformats.org/markup-compatibility/2006" xmlns:p14="http://schemas.microsoft.com/office/powerpoint/2010/main">
+          <mc:Choice Requires="p14">
             <p:contentPart p14:bwMode="auto" r:id="rId2">
               <p14:nvContentPartPr>
                 <p14:cNvPr id="48" name="Ink 47">
@@ -3503,7 +3510,7 @@
               </p14:xfrm>
             </p:contentPart>
           </mc:Choice>
-          <mc:Fallback>
+          <mc:Fallback xmlns="">
             <p:pic>
               <p:nvPicPr>
                 <p:cNvPr id="48" name="Ink 47">
@@ -3534,8 +3541,8 @@
             </p:pic>
           </mc:Fallback>
         </mc:AlternateContent>
-        <mc:AlternateContent xmlns:mc="http://schemas.openxmlformats.org/markup-compatibility/2006">
-          <mc:Choice xmlns:p14="http://schemas.microsoft.com/office/powerpoint/2010/main" Requires="p14">
+        <mc:AlternateContent xmlns:mc="http://schemas.openxmlformats.org/markup-compatibility/2006" xmlns:p14="http://schemas.microsoft.com/office/powerpoint/2010/main">
+          <mc:Choice Requires="p14">
             <p:contentPart p14:bwMode="auto" r:id="rId4">
               <p14:nvContentPartPr>
                 <p14:cNvPr id="50" name="Ink 49">
@@ -3554,7 +3561,7 @@
               </p14:xfrm>
             </p:contentPart>
           </mc:Choice>
-          <mc:Fallback>
+          <mc:Fallback xmlns="">
             <p:pic>
               <p:nvPicPr>
                 <p:cNvPr id="50" name="Ink 49">
@@ -3585,8 +3592,8 @@
             </p:pic>
           </mc:Fallback>
         </mc:AlternateContent>
-        <mc:AlternateContent xmlns:mc="http://schemas.openxmlformats.org/markup-compatibility/2006">
-          <mc:Choice xmlns:p14="http://schemas.microsoft.com/office/powerpoint/2010/main" Requires="p14">
+        <mc:AlternateContent xmlns:mc="http://schemas.openxmlformats.org/markup-compatibility/2006" xmlns:p14="http://schemas.microsoft.com/office/powerpoint/2010/main">
+          <mc:Choice Requires="p14">
             <p:contentPart p14:bwMode="auto" r:id="rId6">
               <p14:nvContentPartPr>
                 <p14:cNvPr id="52" name="Ink 51">
@@ -3605,7 +3612,7 @@
               </p14:xfrm>
             </p:contentPart>
           </mc:Choice>
-          <mc:Fallback>
+          <mc:Fallback xmlns="">
             <p:pic>
               <p:nvPicPr>
                 <p:cNvPr id="52" name="Ink 51">
@@ -3636,8 +3643,8 @@
             </p:pic>
           </mc:Fallback>
         </mc:AlternateContent>
-        <mc:AlternateContent xmlns:mc="http://schemas.openxmlformats.org/markup-compatibility/2006">
-          <mc:Choice xmlns:p14="http://schemas.microsoft.com/office/powerpoint/2010/main" Requires="p14">
+        <mc:AlternateContent xmlns:mc="http://schemas.openxmlformats.org/markup-compatibility/2006" xmlns:p14="http://schemas.microsoft.com/office/powerpoint/2010/main">
+          <mc:Choice Requires="p14">
             <p:contentPart p14:bwMode="auto" r:id="rId8">
               <p14:nvContentPartPr>
                 <p14:cNvPr id="53" name="Ink 52">
@@ -3656,7 +3663,7 @@
               </p14:xfrm>
             </p:contentPart>
           </mc:Choice>
-          <mc:Fallback>
+          <mc:Fallback xmlns="">
             <p:pic>
               <p:nvPicPr>
                 <p:cNvPr id="53" name="Ink 52">
@@ -3687,8 +3694,8 @@
             </p:pic>
           </mc:Fallback>
         </mc:AlternateContent>
-        <mc:AlternateContent xmlns:mc="http://schemas.openxmlformats.org/markup-compatibility/2006">
-          <mc:Choice xmlns:p14="http://schemas.microsoft.com/office/powerpoint/2010/main" Requires="p14">
+        <mc:AlternateContent xmlns:mc="http://schemas.openxmlformats.org/markup-compatibility/2006" xmlns:p14="http://schemas.microsoft.com/office/powerpoint/2010/main">
+          <mc:Choice Requires="p14">
             <p:contentPart p14:bwMode="auto" r:id="rId10">
               <p14:nvContentPartPr>
                 <p14:cNvPr id="54" name="Ink 53">
@@ -3707,7 +3714,7 @@
               </p14:xfrm>
             </p:contentPart>
           </mc:Choice>
-          <mc:Fallback>
+          <mc:Fallback xmlns="">
             <p:pic>
               <p:nvPicPr>
                 <p:cNvPr id="54" name="Ink 53">
@@ -4191,6 +4198,1054 @@
   <p:cSld>
     <p:spTree>
       <p:nvGrpSpPr>
+        <p:cNvPr id="1" name="">
+          <a:extLst>
+            <a:ext uri="{FF2B5EF4-FFF2-40B4-BE49-F238E27FC236}">
+              <a16:creationId xmlns:a16="http://schemas.microsoft.com/office/drawing/2014/main" id="{7C41952B-08B3-A95E-A962-01C355567661}"/>
+            </a:ext>
+          </a:extLst>
+        </p:cNvPr>
+        <p:cNvGrpSpPr/>
+        <p:nvPr/>
+      </p:nvGrpSpPr>
+      <p:grpSpPr>
+        <a:xfrm>
+          <a:off x="0" y="0"/>
+          <a:ext cx="0" cy="0"/>
+          <a:chOff x="0" y="0"/>
+          <a:chExt cx="0" cy="0"/>
+        </a:xfrm>
+      </p:grpSpPr>
+      <p:pic>
+        <p:nvPicPr>
+          <p:cNvPr id="3" name="Picture 2" descr="A blue line with a white background&#10;&#10;AI-generated content may be incorrect.">
+            <a:extLst>
+              <a:ext uri="{FF2B5EF4-FFF2-40B4-BE49-F238E27FC236}">
+                <a16:creationId xmlns:a16="http://schemas.microsoft.com/office/drawing/2014/main" id="{EDBC5B1C-142E-AF34-D29A-7C24EAA31DFB}"/>
+              </a:ext>
+            </a:extLst>
+          </p:cNvPr>
+          <p:cNvPicPr>
+            <a:picLocks noChangeAspect="1"/>
+          </p:cNvPicPr>
+          <p:nvPr/>
+        </p:nvPicPr>
+        <p:blipFill>
+          <a:blip r:embed="rId2">
+            <a:extLst>
+              <a:ext uri="{BEBA8EAE-BF5A-486C-A8C5-ECC9F3942E4B}">
+                <a14:imgProps xmlns:a14="http://schemas.microsoft.com/office/drawing/2010/main">
+                  <a14:imgLayer r:embed="rId3">
+                    <a14:imgEffect>
+                      <a14:backgroundRemoval t="10000" b="90000" l="10000" r="90000"/>
+                    </a14:imgEffect>
+                    <a14:imgEffect>
+                      <a14:artisticGlowEdges/>
+                    </a14:imgEffect>
+                  </a14:imgLayer>
+                </a14:imgProps>
+              </a:ext>
+            </a:extLst>
+          </a:blip>
+          <a:stretch>
+            <a:fillRect/>
+          </a:stretch>
+        </p:blipFill>
+        <p:spPr>
+          <a:xfrm>
+            <a:off x="2739312" y="1474991"/>
+            <a:ext cx="1369979" cy="1369979"/>
+          </a:xfrm>
+          <a:prstGeom prst="rect">
+            <a:avLst/>
+          </a:prstGeom>
+        </p:spPr>
+      </p:pic>
+      <p:grpSp>
+        <p:nvGrpSpPr>
+          <p:cNvPr id="6" name="Group 5">
+            <a:extLst>
+              <a:ext uri="{FF2B5EF4-FFF2-40B4-BE49-F238E27FC236}">
+                <a16:creationId xmlns:a16="http://schemas.microsoft.com/office/drawing/2014/main" id="{EB18A298-C57B-6851-F26C-5FC93309856A}"/>
+              </a:ext>
+            </a:extLst>
+          </p:cNvPr>
+          <p:cNvGrpSpPr/>
+          <p:nvPr/>
+        </p:nvGrpSpPr>
+        <p:grpSpPr>
+          <a:xfrm>
+            <a:off x="1587499" y="1223130"/>
+            <a:ext cx="1765300" cy="1765300"/>
+            <a:chOff x="1587499" y="1223130"/>
+            <a:chExt cx="1765300" cy="1765300"/>
+          </a:xfrm>
+        </p:grpSpPr>
+        <p:sp>
+          <p:nvSpPr>
+            <p:cNvPr id="9" name="Block Arc 8">
+              <a:extLst>
+                <a:ext uri="{FF2B5EF4-FFF2-40B4-BE49-F238E27FC236}">
+                  <a16:creationId xmlns:a16="http://schemas.microsoft.com/office/drawing/2014/main" id="{BE6227F2-1B8C-0C0C-0024-D12726A2D103}"/>
+                </a:ext>
+              </a:extLst>
+            </p:cNvPr>
+            <p:cNvSpPr/>
+            <p:nvPr/>
+          </p:nvSpPr>
+          <p:spPr>
+            <a:xfrm rot="13652997">
+              <a:off x="1587499" y="1223130"/>
+              <a:ext cx="1765300" cy="1765300"/>
+            </a:xfrm>
+            <a:prstGeom prst="blockArc">
+              <a:avLst>
+                <a:gd name="adj1" fmla="val 10800000"/>
+                <a:gd name="adj2" fmla="val 5160737"/>
+                <a:gd name="adj3" fmla="val 6793"/>
+              </a:avLst>
+            </a:prstGeom>
+            <a:solidFill>
+              <a:srgbClr val="0066FF"/>
+            </a:solidFill>
+            <a:ln>
+              <a:solidFill>
+                <a:srgbClr val="0066FF"/>
+              </a:solidFill>
+            </a:ln>
+          </p:spPr>
+          <p:style>
+            <a:lnRef idx="2">
+              <a:schemeClr val="accent1">
+                <a:shade val="15000"/>
+              </a:schemeClr>
+            </a:lnRef>
+            <a:fillRef idx="1">
+              <a:schemeClr val="accent1"/>
+            </a:fillRef>
+            <a:effectRef idx="0">
+              <a:schemeClr val="accent1"/>
+            </a:effectRef>
+            <a:fontRef idx="minor">
+              <a:schemeClr val="lt1"/>
+            </a:fontRef>
+          </p:style>
+          <p:txBody>
+            <a:bodyPr rtlCol="0" anchor="ctr"/>
+            <a:lstStyle/>
+            <a:p>
+              <a:pPr algn="ctr"/>
+              <a:endParaRPr lang="en-US">
+                <a:solidFill>
+                  <a:schemeClr val="tx1"/>
+                </a:solidFill>
+              </a:endParaRPr>
+            </a:p>
+          </p:txBody>
+        </p:sp>
+        <p:sp>
+          <p:nvSpPr>
+            <p:cNvPr id="13" name="Block Arc 12">
+              <a:extLst>
+                <a:ext uri="{FF2B5EF4-FFF2-40B4-BE49-F238E27FC236}">
+                  <a16:creationId xmlns:a16="http://schemas.microsoft.com/office/drawing/2014/main" id="{55BD98E0-8306-44A9-8CB1-C97D6EA211DC}"/>
+                </a:ext>
+              </a:extLst>
+            </p:cNvPr>
+            <p:cNvSpPr/>
+            <p:nvPr/>
+          </p:nvSpPr>
+          <p:spPr>
+            <a:xfrm rot="13652997">
+              <a:off x="1927562" y="1629440"/>
+              <a:ext cx="1079525" cy="1079525"/>
+            </a:xfrm>
+            <a:prstGeom prst="blockArc">
+              <a:avLst>
+                <a:gd name="adj1" fmla="val 10800000"/>
+                <a:gd name="adj2" fmla="val 5136807"/>
+                <a:gd name="adj3" fmla="val 11310"/>
+              </a:avLst>
+            </a:prstGeom>
+            <a:solidFill>
+              <a:srgbClr val="0066FF"/>
+            </a:solidFill>
+            <a:ln>
+              <a:solidFill>
+                <a:srgbClr val="0066FF"/>
+              </a:solidFill>
+            </a:ln>
+          </p:spPr>
+          <p:style>
+            <a:lnRef idx="2">
+              <a:schemeClr val="accent1">
+                <a:shade val="15000"/>
+              </a:schemeClr>
+            </a:lnRef>
+            <a:fillRef idx="1">
+              <a:schemeClr val="accent1"/>
+            </a:fillRef>
+            <a:effectRef idx="0">
+              <a:schemeClr val="accent1"/>
+            </a:effectRef>
+            <a:fontRef idx="minor">
+              <a:schemeClr val="lt1"/>
+            </a:fontRef>
+          </p:style>
+          <p:txBody>
+            <a:bodyPr rtlCol="0" anchor="ctr"/>
+            <a:lstStyle/>
+            <a:p>
+              <a:pPr algn="ctr"/>
+              <a:endParaRPr lang="en-US">
+                <a:solidFill>
+                  <a:schemeClr val="tx1"/>
+                </a:solidFill>
+              </a:endParaRPr>
+            </a:p>
+          </p:txBody>
+        </p:sp>
+        <p:sp>
+          <p:nvSpPr>
+            <p:cNvPr id="14" name="Oval 13">
+              <a:extLst>
+                <a:ext uri="{FF2B5EF4-FFF2-40B4-BE49-F238E27FC236}">
+                  <a16:creationId xmlns:a16="http://schemas.microsoft.com/office/drawing/2014/main" id="{133218B0-380C-F42C-642A-D311EF05BA0D}"/>
+                </a:ext>
+              </a:extLst>
+            </p:cNvPr>
+            <p:cNvSpPr/>
+            <p:nvPr/>
+          </p:nvSpPr>
+          <p:spPr>
+            <a:xfrm>
+              <a:off x="2977497" y="1449600"/>
+              <a:ext cx="122915" cy="122915"/>
+            </a:xfrm>
+            <a:prstGeom prst="ellipse">
+              <a:avLst/>
+            </a:prstGeom>
+            <a:solidFill>
+              <a:srgbClr val="0066FF"/>
+            </a:solidFill>
+            <a:ln>
+              <a:solidFill>
+                <a:srgbClr val="0066FF"/>
+              </a:solidFill>
+            </a:ln>
+          </p:spPr>
+          <p:style>
+            <a:lnRef idx="2">
+              <a:schemeClr val="accent1">
+                <a:shade val="15000"/>
+              </a:schemeClr>
+            </a:lnRef>
+            <a:fillRef idx="1">
+              <a:schemeClr val="accent1"/>
+            </a:fillRef>
+            <a:effectRef idx="0">
+              <a:schemeClr val="accent1"/>
+            </a:effectRef>
+            <a:fontRef idx="minor">
+              <a:schemeClr val="lt1"/>
+            </a:fontRef>
+          </p:style>
+          <p:txBody>
+            <a:bodyPr rtlCol="0" anchor="ctr"/>
+            <a:lstStyle/>
+            <a:p>
+              <a:pPr algn="ctr"/>
+              <a:endParaRPr lang="en-US"/>
+            </a:p>
+          </p:txBody>
+        </p:sp>
+        <p:sp>
+          <p:nvSpPr>
+            <p:cNvPr id="15" name="Oval 14">
+              <a:extLst>
+                <a:ext uri="{FF2B5EF4-FFF2-40B4-BE49-F238E27FC236}">
+                  <a16:creationId xmlns:a16="http://schemas.microsoft.com/office/drawing/2014/main" id="{ECC62595-5F0C-5130-6D85-3C253261EB3F}"/>
+                </a:ext>
+              </a:extLst>
+            </p:cNvPr>
+            <p:cNvSpPr/>
+            <p:nvPr/>
+          </p:nvSpPr>
+          <p:spPr>
+            <a:xfrm>
+              <a:off x="2743832" y="1768689"/>
+              <a:ext cx="122915" cy="122915"/>
+            </a:xfrm>
+            <a:prstGeom prst="ellipse">
+              <a:avLst/>
+            </a:prstGeom>
+            <a:solidFill>
+              <a:srgbClr val="0066FF"/>
+            </a:solidFill>
+            <a:ln>
+              <a:solidFill>
+                <a:srgbClr val="0066FF"/>
+              </a:solidFill>
+            </a:ln>
+          </p:spPr>
+          <p:style>
+            <a:lnRef idx="2">
+              <a:schemeClr val="accent1">
+                <a:shade val="15000"/>
+              </a:schemeClr>
+            </a:lnRef>
+            <a:fillRef idx="1">
+              <a:schemeClr val="accent1"/>
+            </a:fillRef>
+            <a:effectRef idx="0">
+              <a:schemeClr val="accent1"/>
+            </a:effectRef>
+            <a:fontRef idx="minor">
+              <a:schemeClr val="lt1"/>
+            </a:fontRef>
+          </p:style>
+          <p:txBody>
+            <a:bodyPr rtlCol="0" anchor="ctr"/>
+            <a:lstStyle/>
+            <a:p>
+              <a:pPr algn="ctr"/>
+              <a:endParaRPr lang="en-US"/>
+            </a:p>
+          </p:txBody>
+        </p:sp>
+        <p:sp>
+          <p:nvSpPr>
+            <p:cNvPr id="16" name="Oval 15">
+              <a:extLst>
+                <a:ext uri="{FF2B5EF4-FFF2-40B4-BE49-F238E27FC236}">
+                  <a16:creationId xmlns:a16="http://schemas.microsoft.com/office/drawing/2014/main" id="{299577FE-2B2E-1A81-20B5-760806FB445C}"/>
+                </a:ext>
+              </a:extLst>
+            </p:cNvPr>
+            <p:cNvSpPr/>
+            <p:nvPr/>
+          </p:nvSpPr>
+          <p:spPr>
+            <a:xfrm>
+              <a:off x="2741451" y="2451367"/>
+              <a:ext cx="122915" cy="122915"/>
+            </a:xfrm>
+            <a:prstGeom prst="ellipse">
+              <a:avLst/>
+            </a:prstGeom>
+            <a:solidFill>
+              <a:srgbClr val="0066FF"/>
+            </a:solidFill>
+            <a:ln>
+              <a:solidFill>
+                <a:srgbClr val="0066FF"/>
+              </a:solidFill>
+            </a:ln>
+          </p:spPr>
+          <p:style>
+            <a:lnRef idx="2">
+              <a:schemeClr val="accent1">
+                <a:shade val="15000"/>
+              </a:schemeClr>
+            </a:lnRef>
+            <a:fillRef idx="1">
+              <a:schemeClr val="accent1"/>
+            </a:fillRef>
+            <a:effectRef idx="0">
+              <a:schemeClr val="accent1"/>
+            </a:effectRef>
+            <a:fontRef idx="minor">
+              <a:schemeClr val="lt1"/>
+            </a:fontRef>
+          </p:style>
+          <p:txBody>
+            <a:bodyPr rtlCol="0" anchor="ctr"/>
+            <a:lstStyle/>
+            <a:p>
+              <a:pPr algn="ctr"/>
+              <a:endParaRPr lang="en-US"/>
+            </a:p>
+          </p:txBody>
+        </p:sp>
+        <p:sp>
+          <p:nvSpPr>
+            <p:cNvPr id="17" name="Oval 16">
+              <a:extLst>
+                <a:ext uri="{FF2B5EF4-FFF2-40B4-BE49-F238E27FC236}">
+                  <a16:creationId xmlns:a16="http://schemas.microsoft.com/office/drawing/2014/main" id="{9886C03F-B8C9-9EB3-11FC-E22A3DA4C2E2}"/>
+                </a:ext>
+              </a:extLst>
+            </p:cNvPr>
+            <p:cNvSpPr/>
+            <p:nvPr/>
+          </p:nvSpPr>
+          <p:spPr>
+            <a:xfrm>
+              <a:off x="2964611" y="2649752"/>
+              <a:ext cx="122915" cy="122915"/>
+            </a:xfrm>
+            <a:prstGeom prst="ellipse">
+              <a:avLst/>
+            </a:prstGeom>
+            <a:solidFill>
+              <a:srgbClr val="0066FF"/>
+            </a:solidFill>
+            <a:ln>
+              <a:solidFill>
+                <a:srgbClr val="0066FF"/>
+              </a:solidFill>
+            </a:ln>
+          </p:spPr>
+          <p:style>
+            <a:lnRef idx="2">
+              <a:schemeClr val="accent1">
+                <a:shade val="15000"/>
+              </a:schemeClr>
+            </a:lnRef>
+            <a:fillRef idx="1">
+              <a:schemeClr val="accent1"/>
+            </a:fillRef>
+            <a:effectRef idx="0">
+              <a:schemeClr val="accent1"/>
+            </a:effectRef>
+            <a:fontRef idx="minor">
+              <a:schemeClr val="lt1"/>
+            </a:fontRef>
+          </p:style>
+          <p:txBody>
+            <a:bodyPr rtlCol="0" anchor="ctr"/>
+            <a:lstStyle/>
+            <a:p>
+              <a:pPr algn="ctr"/>
+              <a:endParaRPr lang="en-US"/>
+            </a:p>
+          </p:txBody>
+        </p:sp>
+        <p:pic>
+          <p:nvPicPr>
+            <p:cNvPr id="18" name="Picture 17">
+              <a:extLst>
+                <a:ext uri="{FF2B5EF4-FFF2-40B4-BE49-F238E27FC236}">
+                  <a16:creationId xmlns:a16="http://schemas.microsoft.com/office/drawing/2014/main" id="{232AE771-CDF2-3133-2F20-D94903FAF78D}"/>
+                </a:ext>
+              </a:extLst>
+            </p:cNvPr>
+            <p:cNvPicPr>
+              <a:picLocks noChangeAspect="1"/>
+            </p:cNvPicPr>
+            <p:nvPr/>
+          </p:nvPicPr>
+          <p:blipFill>
+            <a:blip r:embed="rId4"/>
+            <a:stretch>
+              <a:fillRect/>
+            </a:stretch>
+          </p:blipFill>
+          <p:spPr>
+            <a:xfrm>
+              <a:off x="2088236" y="1892329"/>
+              <a:ext cx="1130013" cy="619876"/>
+            </a:xfrm>
+            <a:prstGeom prst="rect">
+              <a:avLst/>
+            </a:prstGeom>
+          </p:spPr>
+        </p:pic>
+      </p:grpSp>
+    </p:spTree>
+    <p:extLst>
+      <p:ext uri="{BB962C8B-B14F-4D97-AF65-F5344CB8AC3E}">
+        <p14:creationId xmlns:p14="http://schemas.microsoft.com/office/powerpoint/2010/main" val="1466899758"/>
+      </p:ext>
+    </p:extLst>
+  </p:cSld>
+  <p:clrMapOvr>
+    <a:masterClrMapping/>
+  </p:clrMapOvr>
+</p:sld>
+</file>
+
+<file path=ppt/slides/slide3.xml><?xml version="1.0" encoding="utf-8"?>
+<p:sld xmlns:a="http://schemas.openxmlformats.org/drawingml/2006/main" xmlns:r="http://schemas.openxmlformats.org/officeDocument/2006/relationships" xmlns:p="http://schemas.openxmlformats.org/presentationml/2006/main">
+  <p:cSld>
+    <p:spTree>
+      <p:nvGrpSpPr>
+        <p:cNvPr id="1" name="">
+          <a:extLst>
+            <a:ext uri="{FF2B5EF4-FFF2-40B4-BE49-F238E27FC236}">
+              <a16:creationId xmlns:a16="http://schemas.microsoft.com/office/drawing/2014/main" id="{0DD3B076-DF06-2795-4470-554C894F5248}"/>
+            </a:ext>
+          </a:extLst>
+        </p:cNvPr>
+        <p:cNvGrpSpPr/>
+        <p:nvPr/>
+      </p:nvGrpSpPr>
+      <p:grpSpPr>
+        <a:xfrm>
+          <a:off x="0" y="0"/>
+          <a:ext cx="0" cy="0"/>
+          <a:chOff x="0" y="0"/>
+          <a:chExt cx="0" cy="0"/>
+        </a:xfrm>
+      </p:grpSpPr>
+      <p:pic>
+        <p:nvPicPr>
+          <p:cNvPr id="3" name="Picture 2" descr="A blue line with a white background&#10;&#10;AI-generated content may be incorrect.">
+            <a:extLst>
+              <a:ext uri="{FF2B5EF4-FFF2-40B4-BE49-F238E27FC236}">
+                <a16:creationId xmlns:a16="http://schemas.microsoft.com/office/drawing/2014/main" id="{C6D102DF-623F-B143-AE0A-F1B74AC04CE5}"/>
+              </a:ext>
+            </a:extLst>
+          </p:cNvPr>
+          <p:cNvPicPr>
+            <a:picLocks noChangeAspect="1"/>
+          </p:cNvPicPr>
+          <p:nvPr/>
+        </p:nvPicPr>
+        <p:blipFill>
+          <a:blip r:embed="rId2">
+            <a:extLst>
+              <a:ext uri="{BEBA8EAE-BF5A-486C-A8C5-ECC9F3942E4B}">
+                <a14:imgProps xmlns:a14="http://schemas.microsoft.com/office/drawing/2010/main">
+                  <a14:imgLayer r:embed="rId3">
+                    <a14:imgEffect>
+                      <a14:backgroundRemoval t="10000" b="90000" l="10000" r="90000"/>
+                    </a14:imgEffect>
+                    <a14:imgEffect>
+                      <a14:artisticGlowEdges/>
+                    </a14:imgEffect>
+                  </a14:imgLayer>
+                </a14:imgProps>
+              </a:ext>
+            </a:extLst>
+          </a:blip>
+          <a:stretch>
+            <a:fillRect/>
+          </a:stretch>
+        </p:blipFill>
+        <p:spPr>
+          <a:xfrm>
+            <a:off x="2739312" y="1474991"/>
+            <a:ext cx="1369979" cy="1369979"/>
+          </a:xfrm>
+          <a:prstGeom prst="rect">
+            <a:avLst/>
+          </a:prstGeom>
+        </p:spPr>
+      </p:pic>
+      <p:grpSp>
+        <p:nvGrpSpPr>
+          <p:cNvPr id="6" name="Group 5">
+            <a:extLst>
+              <a:ext uri="{FF2B5EF4-FFF2-40B4-BE49-F238E27FC236}">
+                <a16:creationId xmlns:a16="http://schemas.microsoft.com/office/drawing/2014/main" id="{58D00A25-5D5F-D506-5E27-19D9C762A31A}"/>
+              </a:ext>
+            </a:extLst>
+          </p:cNvPr>
+          <p:cNvGrpSpPr/>
+          <p:nvPr/>
+        </p:nvGrpSpPr>
+        <p:grpSpPr>
+          <a:xfrm>
+            <a:off x="1587499" y="1223130"/>
+            <a:ext cx="1765300" cy="1765300"/>
+            <a:chOff x="1587499" y="1223130"/>
+            <a:chExt cx="1765300" cy="1765300"/>
+          </a:xfrm>
+        </p:grpSpPr>
+        <p:sp>
+          <p:nvSpPr>
+            <p:cNvPr id="9" name="Block Arc 8">
+              <a:extLst>
+                <a:ext uri="{FF2B5EF4-FFF2-40B4-BE49-F238E27FC236}">
+                  <a16:creationId xmlns:a16="http://schemas.microsoft.com/office/drawing/2014/main" id="{A5DC0E5C-B338-34D5-B3AF-EF47833AA3EF}"/>
+                </a:ext>
+              </a:extLst>
+            </p:cNvPr>
+            <p:cNvSpPr/>
+            <p:nvPr/>
+          </p:nvSpPr>
+          <p:spPr>
+            <a:xfrm rot="13652997">
+              <a:off x="1587499" y="1223130"/>
+              <a:ext cx="1765300" cy="1765300"/>
+            </a:xfrm>
+            <a:prstGeom prst="blockArc">
+              <a:avLst>
+                <a:gd name="adj1" fmla="val 10800000"/>
+                <a:gd name="adj2" fmla="val 5160737"/>
+                <a:gd name="adj3" fmla="val 6793"/>
+              </a:avLst>
+            </a:prstGeom>
+            <a:solidFill>
+              <a:srgbClr val="0066FF"/>
+            </a:solidFill>
+            <a:ln>
+              <a:solidFill>
+                <a:srgbClr val="0066FF"/>
+              </a:solidFill>
+            </a:ln>
+          </p:spPr>
+          <p:style>
+            <a:lnRef idx="2">
+              <a:schemeClr val="accent1">
+                <a:shade val="15000"/>
+              </a:schemeClr>
+            </a:lnRef>
+            <a:fillRef idx="1">
+              <a:schemeClr val="accent1"/>
+            </a:fillRef>
+            <a:effectRef idx="0">
+              <a:schemeClr val="accent1"/>
+            </a:effectRef>
+            <a:fontRef idx="minor">
+              <a:schemeClr val="lt1"/>
+            </a:fontRef>
+          </p:style>
+          <p:txBody>
+            <a:bodyPr rtlCol="0" anchor="ctr"/>
+            <a:lstStyle/>
+            <a:p>
+              <a:pPr algn="ctr"/>
+              <a:endParaRPr lang="en-US">
+                <a:solidFill>
+                  <a:schemeClr val="tx1"/>
+                </a:solidFill>
+              </a:endParaRPr>
+            </a:p>
+          </p:txBody>
+        </p:sp>
+        <p:sp>
+          <p:nvSpPr>
+            <p:cNvPr id="13" name="Block Arc 12">
+              <a:extLst>
+                <a:ext uri="{FF2B5EF4-FFF2-40B4-BE49-F238E27FC236}">
+                  <a16:creationId xmlns:a16="http://schemas.microsoft.com/office/drawing/2014/main" id="{1196045C-0452-2BA2-BEA1-0B38EE1FD24C}"/>
+                </a:ext>
+              </a:extLst>
+            </p:cNvPr>
+            <p:cNvSpPr/>
+            <p:nvPr/>
+          </p:nvSpPr>
+          <p:spPr>
+            <a:xfrm rot="13652997">
+              <a:off x="1927562" y="1629440"/>
+              <a:ext cx="1079525" cy="1079525"/>
+            </a:xfrm>
+            <a:prstGeom prst="blockArc">
+              <a:avLst>
+                <a:gd name="adj1" fmla="val 10800000"/>
+                <a:gd name="adj2" fmla="val 5136807"/>
+                <a:gd name="adj3" fmla="val 11310"/>
+              </a:avLst>
+            </a:prstGeom>
+            <a:solidFill>
+              <a:srgbClr val="0066FF"/>
+            </a:solidFill>
+            <a:ln>
+              <a:solidFill>
+                <a:srgbClr val="0066FF"/>
+              </a:solidFill>
+            </a:ln>
+          </p:spPr>
+          <p:style>
+            <a:lnRef idx="2">
+              <a:schemeClr val="accent1">
+                <a:shade val="15000"/>
+              </a:schemeClr>
+            </a:lnRef>
+            <a:fillRef idx="1">
+              <a:schemeClr val="accent1"/>
+            </a:fillRef>
+            <a:effectRef idx="0">
+              <a:schemeClr val="accent1"/>
+            </a:effectRef>
+            <a:fontRef idx="minor">
+              <a:schemeClr val="lt1"/>
+            </a:fontRef>
+          </p:style>
+          <p:txBody>
+            <a:bodyPr rtlCol="0" anchor="ctr"/>
+            <a:lstStyle/>
+            <a:p>
+              <a:pPr algn="ctr"/>
+              <a:endParaRPr lang="en-US">
+                <a:solidFill>
+                  <a:schemeClr val="tx1"/>
+                </a:solidFill>
+              </a:endParaRPr>
+            </a:p>
+          </p:txBody>
+        </p:sp>
+        <p:sp>
+          <p:nvSpPr>
+            <p:cNvPr id="14" name="Oval 13">
+              <a:extLst>
+                <a:ext uri="{FF2B5EF4-FFF2-40B4-BE49-F238E27FC236}">
+                  <a16:creationId xmlns:a16="http://schemas.microsoft.com/office/drawing/2014/main" id="{79636F05-D836-3056-F60C-38440D0B53B1}"/>
+                </a:ext>
+              </a:extLst>
+            </p:cNvPr>
+            <p:cNvSpPr/>
+            <p:nvPr/>
+          </p:nvSpPr>
+          <p:spPr>
+            <a:xfrm>
+              <a:off x="2977497" y="1449600"/>
+              <a:ext cx="122915" cy="122915"/>
+            </a:xfrm>
+            <a:prstGeom prst="ellipse">
+              <a:avLst/>
+            </a:prstGeom>
+            <a:solidFill>
+              <a:srgbClr val="0066FF"/>
+            </a:solidFill>
+            <a:ln>
+              <a:solidFill>
+                <a:srgbClr val="0066FF"/>
+              </a:solidFill>
+            </a:ln>
+          </p:spPr>
+          <p:style>
+            <a:lnRef idx="2">
+              <a:schemeClr val="accent1">
+                <a:shade val="15000"/>
+              </a:schemeClr>
+            </a:lnRef>
+            <a:fillRef idx="1">
+              <a:schemeClr val="accent1"/>
+            </a:fillRef>
+            <a:effectRef idx="0">
+              <a:schemeClr val="accent1"/>
+            </a:effectRef>
+            <a:fontRef idx="minor">
+              <a:schemeClr val="lt1"/>
+            </a:fontRef>
+          </p:style>
+          <p:txBody>
+            <a:bodyPr rtlCol="0" anchor="ctr"/>
+            <a:lstStyle/>
+            <a:p>
+              <a:pPr algn="ctr"/>
+              <a:endParaRPr lang="en-US"/>
+            </a:p>
+          </p:txBody>
+        </p:sp>
+        <p:sp>
+          <p:nvSpPr>
+            <p:cNvPr id="15" name="Oval 14">
+              <a:extLst>
+                <a:ext uri="{FF2B5EF4-FFF2-40B4-BE49-F238E27FC236}">
+                  <a16:creationId xmlns:a16="http://schemas.microsoft.com/office/drawing/2014/main" id="{DC3C54F7-57B2-28B1-8BCE-AB5EB389460F}"/>
+                </a:ext>
+              </a:extLst>
+            </p:cNvPr>
+            <p:cNvSpPr/>
+            <p:nvPr/>
+          </p:nvSpPr>
+          <p:spPr>
+            <a:xfrm>
+              <a:off x="2743832" y="1768689"/>
+              <a:ext cx="122915" cy="122915"/>
+            </a:xfrm>
+            <a:prstGeom prst="ellipse">
+              <a:avLst/>
+            </a:prstGeom>
+            <a:solidFill>
+              <a:srgbClr val="0066FF"/>
+            </a:solidFill>
+            <a:ln>
+              <a:solidFill>
+                <a:srgbClr val="0066FF"/>
+              </a:solidFill>
+            </a:ln>
+          </p:spPr>
+          <p:style>
+            <a:lnRef idx="2">
+              <a:schemeClr val="accent1">
+                <a:shade val="15000"/>
+              </a:schemeClr>
+            </a:lnRef>
+            <a:fillRef idx="1">
+              <a:schemeClr val="accent1"/>
+            </a:fillRef>
+            <a:effectRef idx="0">
+              <a:schemeClr val="accent1"/>
+            </a:effectRef>
+            <a:fontRef idx="minor">
+              <a:schemeClr val="lt1"/>
+            </a:fontRef>
+          </p:style>
+          <p:txBody>
+            <a:bodyPr rtlCol="0" anchor="ctr"/>
+            <a:lstStyle/>
+            <a:p>
+              <a:pPr algn="ctr"/>
+              <a:endParaRPr lang="en-US"/>
+            </a:p>
+          </p:txBody>
+        </p:sp>
+        <p:sp>
+          <p:nvSpPr>
+            <p:cNvPr id="16" name="Oval 15">
+              <a:extLst>
+                <a:ext uri="{FF2B5EF4-FFF2-40B4-BE49-F238E27FC236}">
+                  <a16:creationId xmlns:a16="http://schemas.microsoft.com/office/drawing/2014/main" id="{C65488AE-7BBE-EE90-6C60-12978F772565}"/>
+                </a:ext>
+              </a:extLst>
+            </p:cNvPr>
+            <p:cNvSpPr/>
+            <p:nvPr/>
+          </p:nvSpPr>
+          <p:spPr>
+            <a:xfrm>
+              <a:off x="2741451" y="2451367"/>
+              <a:ext cx="122915" cy="122915"/>
+            </a:xfrm>
+            <a:prstGeom prst="ellipse">
+              <a:avLst/>
+            </a:prstGeom>
+            <a:solidFill>
+              <a:srgbClr val="0066FF"/>
+            </a:solidFill>
+            <a:ln>
+              <a:solidFill>
+                <a:srgbClr val="0066FF"/>
+              </a:solidFill>
+            </a:ln>
+          </p:spPr>
+          <p:style>
+            <a:lnRef idx="2">
+              <a:schemeClr val="accent1">
+                <a:shade val="15000"/>
+              </a:schemeClr>
+            </a:lnRef>
+            <a:fillRef idx="1">
+              <a:schemeClr val="accent1"/>
+            </a:fillRef>
+            <a:effectRef idx="0">
+              <a:schemeClr val="accent1"/>
+            </a:effectRef>
+            <a:fontRef idx="minor">
+              <a:schemeClr val="lt1"/>
+            </a:fontRef>
+          </p:style>
+          <p:txBody>
+            <a:bodyPr rtlCol="0" anchor="ctr"/>
+            <a:lstStyle/>
+            <a:p>
+              <a:pPr algn="ctr"/>
+              <a:endParaRPr lang="en-US"/>
+            </a:p>
+          </p:txBody>
+        </p:sp>
+        <p:sp>
+          <p:nvSpPr>
+            <p:cNvPr id="17" name="Oval 16">
+              <a:extLst>
+                <a:ext uri="{FF2B5EF4-FFF2-40B4-BE49-F238E27FC236}">
+                  <a16:creationId xmlns:a16="http://schemas.microsoft.com/office/drawing/2014/main" id="{306173D0-484E-D43E-15C7-7E0CE020DEA4}"/>
+                </a:ext>
+              </a:extLst>
+            </p:cNvPr>
+            <p:cNvSpPr/>
+            <p:nvPr/>
+          </p:nvSpPr>
+          <p:spPr>
+            <a:xfrm>
+              <a:off x="2964611" y="2649752"/>
+              <a:ext cx="122915" cy="122915"/>
+            </a:xfrm>
+            <a:prstGeom prst="ellipse">
+              <a:avLst/>
+            </a:prstGeom>
+            <a:solidFill>
+              <a:srgbClr val="0066FF"/>
+            </a:solidFill>
+            <a:ln>
+              <a:solidFill>
+                <a:srgbClr val="0066FF"/>
+              </a:solidFill>
+            </a:ln>
+          </p:spPr>
+          <p:style>
+            <a:lnRef idx="2">
+              <a:schemeClr val="accent1">
+                <a:shade val="15000"/>
+              </a:schemeClr>
+            </a:lnRef>
+            <a:fillRef idx="1">
+              <a:schemeClr val="accent1"/>
+            </a:fillRef>
+            <a:effectRef idx="0">
+              <a:schemeClr val="accent1"/>
+            </a:effectRef>
+            <a:fontRef idx="minor">
+              <a:schemeClr val="lt1"/>
+            </a:fontRef>
+          </p:style>
+          <p:txBody>
+            <a:bodyPr rtlCol="0" anchor="ctr"/>
+            <a:lstStyle/>
+            <a:p>
+              <a:pPr algn="ctr"/>
+              <a:endParaRPr lang="en-US"/>
+            </a:p>
+          </p:txBody>
+        </p:sp>
+        <p:pic>
+          <p:nvPicPr>
+            <p:cNvPr id="18" name="Picture 17">
+              <a:extLst>
+                <a:ext uri="{FF2B5EF4-FFF2-40B4-BE49-F238E27FC236}">
+                  <a16:creationId xmlns:a16="http://schemas.microsoft.com/office/drawing/2014/main" id="{4C9754FC-104A-87B3-6F32-15FA9BAC18EE}"/>
+                </a:ext>
+              </a:extLst>
+            </p:cNvPr>
+            <p:cNvPicPr>
+              <a:picLocks noChangeAspect="1"/>
+            </p:cNvPicPr>
+            <p:nvPr/>
+          </p:nvPicPr>
+          <p:blipFill>
+            <a:blip r:embed="rId4"/>
+            <a:stretch>
+              <a:fillRect/>
+            </a:stretch>
+          </p:blipFill>
+          <p:spPr>
+            <a:xfrm>
+              <a:off x="2088236" y="1892329"/>
+              <a:ext cx="1130013" cy="619876"/>
+            </a:xfrm>
+            <a:prstGeom prst="rect">
+              <a:avLst/>
+            </a:prstGeom>
+          </p:spPr>
+        </p:pic>
+      </p:grpSp>
+      <p:sp>
+        <p:nvSpPr>
+          <p:cNvPr id="4" name="Rectangle 3">
+            <a:extLst>
+              <a:ext uri="{FF2B5EF4-FFF2-40B4-BE49-F238E27FC236}">
+                <a16:creationId xmlns:a16="http://schemas.microsoft.com/office/drawing/2014/main" id="{A8D8E535-BAD7-D9F8-3DE3-3DC8FD57C3AB}"/>
+              </a:ext>
+            </a:extLst>
+          </p:cNvPr>
+          <p:cNvSpPr/>
+          <p:nvPr/>
+        </p:nvSpPr>
+        <p:spPr>
+          <a:xfrm>
+            <a:off x="1909253" y="985605"/>
+            <a:ext cx="1607389" cy="420612"/>
+          </a:xfrm>
+          <a:prstGeom prst="rect">
+            <a:avLst/>
+          </a:prstGeom>
+          <a:solidFill>
+            <a:schemeClr val="bg1"/>
+          </a:solidFill>
+          <a:ln>
+            <a:noFill/>
+          </a:ln>
+        </p:spPr>
+        <p:style>
+          <a:lnRef idx="2">
+            <a:schemeClr val="accent1">
+              <a:shade val="15000"/>
+            </a:schemeClr>
+          </a:lnRef>
+          <a:fillRef idx="1">
+            <a:schemeClr val="accent1"/>
+          </a:fillRef>
+          <a:effectRef idx="0">
+            <a:schemeClr val="accent1"/>
+          </a:effectRef>
+          <a:fontRef idx="minor">
+            <a:schemeClr val="lt1"/>
+          </a:fontRef>
+        </p:style>
+        <p:txBody>
+          <a:bodyPr rtlCol="0" anchor="ctr"/>
+          <a:lstStyle/>
+          <a:p>
+            <a:pPr algn="ctr"/>
+            <a:endParaRPr lang="en-US"/>
+          </a:p>
+        </p:txBody>
+      </p:sp>
+      <p:sp>
+        <p:nvSpPr>
+          <p:cNvPr id="5" name="Rectangle 4">
+            <a:extLst>
+              <a:ext uri="{FF2B5EF4-FFF2-40B4-BE49-F238E27FC236}">
+                <a16:creationId xmlns:a16="http://schemas.microsoft.com/office/drawing/2014/main" id="{0A152BCC-A051-DCAE-3F90-8044ED81428E}"/>
+              </a:ext>
+            </a:extLst>
+          </p:cNvPr>
+          <p:cNvSpPr/>
+          <p:nvPr/>
+        </p:nvSpPr>
+        <p:spPr>
+          <a:xfrm>
+            <a:off x="765320" y="1381417"/>
+            <a:ext cx="1607389" cy="1880896"/>
+          </a:xfrm>
+          <a:prstGeom prst="rect">
+            <a:avLst/>
+          </a:prstGeom>
+          <a:solidFill>
+            <a:schemeClr val="bg1"/>
+          </a:solidFill>
+          <a:ln>
+            <a:noFill/>
+          </a:ln>
+        </p:spPr>
+        <p:style>
+          <a:lnRef idx="2">
+            <a:schemeClr val="accent1">
+              <a:shade val="15000"/>
+            </a:schemeClr>
+          </a:lnRef>
+          <a:fillRef idx="1">
+            <a:schemeClr val="accent1"/>
+          </a:fillRef>
+          <a:effectRef idx="0">
+            <a:schemeClr val="accent1"/>
+          </a:effectRef>
+          <a:fontRef idx="minor">
+            <a:schemeClr val="lt1"/>
+          </a:fontRef>
+        </p:style>
+        <p:txBody>
+          <a:bodyPr rtlCol="0" anchor="ctr"/>
+          <a:lstStyle/>
+          <a:p>
+            <a:pPr algn="ctr"/>
+            <a:endParaRPr lang="en-US"/>
+          </a:p>
+        </p:txBody>
+      </p:sp>
+    </p:spTree>
+    <p:extLst>
+      <p:ext uri="{BB962C8B-B14F-4D97-AF65-F5344CB8AC3E}">
+        <p14:creationId xmlns:p14="http://schemas.microsoft.com/office/powerpoint/2010/main" val="2516144465"/>
+      </p:ext>
+    </p:extLst>
+  </p:cSld>
+  <p:clrMapOvr>
+    <a:masterClrMapping/>
+  </p:clrMapOvr>
+</p:sld>
+</file>
+
+<file path=ppt/slides/slide4.xml><?xml version="1.0" encoding="utf-8"?>
+<p:sld xmlns:a="http://schemas.openxmlformats.org/drawingml/2006/main" xmlns:r="http://schemas.openxmlformats.org/officeDocument/2006/relationships" xmlns:p="http://schemas.openxmlformats.org/presentationml/2006/main">
+  <p:cSld>
+    <p:spTree>
+      <p:nvGrpSpPr>
         <p:cNvPr id="1" name=""/>
         <p:cNvGrpSpPr/>
         <p:nvPr/>
